--- a/scripts/PowerPoint Slide Inventory Script/refined_v2/iteration_3/deck.pptx
+++ b/scripts/PowerPoint Slide Inventory Script/refined_v2/iteration_3/deck.pptx
@@ -15684,109 +15684,77 @@
           <a:lstStyle/>
           <a:p>
             <a:r>
-              <a:t>Six principal areas of specialism</a:t>
-            </a:r>
-          </a:p>
-        </p:txBody>
-      </p:sp>
-      <p:sp>
-        <p:nvSpPr>
-          <p:cNvPr id="3" name="Text Placeholder 2"/>
-          <p:cNvSpPr>
-            <a:spLocks noGrp="1"/>
-          </p:cNvSpPr>
-          <p:nvPr>
-            <p:ph type="body" idx="12" sz="quarter"/>
+              <a:t>Six DDaT specialisms across the lifecycle</a:t>
+            </a:r>
+          </a:p>
+        </p:txBody>
+      </p:sp>
+      <p:sp>
+        <p:nvSpPr>
+          <p:cNvPr id="3" name="Content Placeholder 2"/>
+          <p:cNvSpPr>
+            <a:spLocks noGrp="1"/>
+          </p:cNvSpPr>
+          <p:nvPr>
+            <p:ph idx="17" sz="quarter"/>
           </p:nvPr>
         </p:nvSpPr>
         <p:spPr/>
         <p:txBody>
           <a:bodyPr/>
           <a:lstStyle/>
-          <a:p>
-            <a:pPr>
-              <a:spcBef>
-                <a:spcPts val="400"/>
-              </a:spcBef>
-              <a:buChar char="•"/>
-            </a:pPr>
-            <a:r>
-              <a:rPr>
-                <a:latin typeface="Arial"/>
-              </a:rPr>
-              <a:t>Digital Service Design: user-centred, inclusive, outcome-driven</a:t>
-            </a:r>
-          </a:p>
-          <a:p>
-            <a:pPr>
-              <a:spcBef>
-                <a:spcPts val="400"/>
-              </a:spcBef>
-              <a:buChar char="•"/>
-            </a:pPr>
-            <a:r>
-              <a:rPr>
-                <a:latin typeface="Arial"/>
-              </a:rPr>
-              <a:t>Data, Analytics &amp; AI: governed platforms, predictive insights</a:t>
-            </a:r>
-          </a:p>
-          <a:p>
-            <a:pPr>
-              <a:spcBef>
-                <a:spcPts val="400"/>
-              </a:spcBef>
-              <a:buChar char="•"/>
-            </a:pPr>
-            <a:r>
-              <a:rPr>
-                <a:latin typeface="Arial"/>
-              </a:rPr>
-              <a:t>Platforms &amp; Integration: modular, API-led architectures</a:t>
-            </a:r>
-          </a:p>
-          <a:p>
-            <a:pPr>
-              <a:spcBef>
-                <a:spcPts val="400"/>
-              </a:spcBef>
-              <a:buChar char="•"/>
-            </a:pPr>
-            <a:r>
-              <a:rPr>
-                <a:latin typeface="Arial"/>
-              </a:rPr>
-              <a:t>Cloud &amp; DevOps: secure hybrid adoption, FinOps, resilience</a:t>
-            </a:r>
-          </a:p>
-          <a:p>
-            <a:pPr>
-              <a:spcBef>
-                <a:spcPts val="400"/>
-              </a:spcBef>
-              <a:buChar char="•"/>
-            </a:pPr>
-            <a:r>
-              <a:rPr>
-                <a:latin typeface="Arial"/>
-              </a:rPr>
-              <a:t>Technical Consultancy: advisory, coaching, embedded delivery</a:t>
-            </a:r>
-          </a:p>
-          <a:p>
-            <a:pPr>
-              <a:spcBef>
-                <a:spcPts val="400"/>
-              </a:spcBef>
-              <a:buChar char="•"/>
-            </a:pPr>
-            <a:r>
-              <a:rPr>
-                <a:latin typeface="Arial"/>
-              </a:rPr>
-              <a:t>Agile Delivery: product-led, measurable value, scaling</a:t>
-            </a:r>
-          </a:p>
+          <a:p/>
+        </p:txBody>
+      </p:sp>
+      <p:sp>
+        <p:nvSpPr>
+          <p:cNvPr id="4" name="Content Placeholder 3"/>
+          <p:cNvSpPr>
+            <a:spLocks noGrp="1"/>
+          </p:cNvSpPr>
+          <p:nvPr>
+            <p:ph idx="18" sz="quarter"/>
+          </p:nvPr>
+        </p:nvSpPr>
+        <p:spPr/>
+        <p:txBody>
+          <a:bodyPr/>
+          <a:lstStyle/>
+          <a:p/>
+        </p:txBody>
+      </p:sp>
+      <p:sp>
+        <p:nvSpPr>
+          <p:cNvPr id="5" name="Content Placeholder 4"/>
+          <p:cNvSpPr>
+            <a:spLocks noGrp="1"/>
+          </p:cNvSpPr>
+          <p:nvPr>
+            <p:ph idx="20" sz="quarter"/>
+          </p:nvPr>
+        </p:nvSpPr>
+        <p:spPr/>
+        <p:txBody>
+          <a:bodyPr/>
+          <a:lstStyle/>
+          <a:p/>
+        </p:txBody>
+      </p:sp>
+      <p:sp>
+        <p:nvSpPr>
+          <p:cNvPr id="6" name="Content Placeholder 5"/>
+          <p:cNvSpPr>
+            <a:spLocks noGrp="1"/>
+          </p:cNvSpPr>
+          <p:nvPr>
+            <p:ph idx="19" sz="quarter"/>
+          </p:nvPr>
+        </p:nvSpPr>
+        <p:spPr/>
+        <p:txBody>
+          <a:bodyPr/>
+          <a:lstStyle/>
+          <a:p/>
         </p:txBody>
       </p:sp>
     </p:spTree>
@@ -15823,125 +15791,77 @@
           <a:lstStyle/>
           <a:p>
             <a:r>
-              <a:t>Integrated Delivery Operating Model</a:t>
-            </a:r>
-          </a:p>
-        </p:txBody>
-      </p:sp>
-      <p:sp>
-        <p:nvSpPr>
-          <p:cNvPr id="3" name="Text Placeholder 2"/>
-          <p:cNvSpPr>
-            <a:spLocks noGrp="1"/>
-          </p:cNvSpPr>
-          <p:nvPr>
-            <p:ph type="body" idx="12" sz="quarter"/>
+              <a:t>Integrated delivery operating model</a:t>
+            </a:r>
+          </a:p>
+        </p:txBody>
+      </p:sp>
+      <p:sp>
+        <p:nvSpPr>
+          <p:cNvPr id="3" name="Content Placeholder 2"/>
+          <p:cNvSpPr>
+            <a:spLocks noGrp="1"/>
+          </p:cNvSpPr>
+          <p:nvPr>
+            <p:ph idx="17" sz="quarter"/>
           </p:nvPr>
         </p:nvSpPr>
         <p:spPr/>
         <p:txBody>
           <a:bodyPr/>
           <a:lstStyle/>
-          <a:p>
-            <a:pPr>
-              <a:spcBef>
-                <a:spcPts val="400"/>
-              </a:spcBef>
-            </a:pPr>
-            <a:r>
-              <a:rPr>
-                <a:latin typeface="Arial"/>
-              </a:rPr>
-              <a:t>Strategic governance: align to priorities</a:t>
-            </a:r>
-          </a:p>
-        </p:txBody>
-      </p:sp>
-      <p:sp>
-        <p:nvSpPr>
-          <p:cNvPr id="4" name="Text Placeholder 3"/>
-          <p:cNvSpPr>
-            <a:spLocks noGrp="1"/>
-          </p:cNvSpPr>
-          <p:nvPr>
-            <p:ph type="body" idx="13" sz="quarter"/>
+          <a:p/>
+        </p:txBody>
+      </p:sp>
+      <p:sp>
+        <p:nvSpPr>
+          <p:cNvPr id="4" name="Content Placeholder 3"/>
+          <p:cNvSpPr>
+            <a:spLocks noGrp="1"/>
+          </p:cNvSpPr>
+          <p:nvPr>
+            <p:ph idx="18" sz="quarter"/>
           </p:nvPr>
         </p:nvSpPr>
         <p:spPr/>
         <p:txBody>
           <a:bodyPr/>
           <a:lstStyle/>
-          <a:p>
-            <a:pPr>
-              <a:spcBef>
-                <a:spcPts val="400"/>
-              </a:spcBef>
-            </a:pPr>
-            <a:r>
-              <a:rPr>
-                <a:latin typeface="Arial"/>
-              </a:rPr>
-              <a:t>Programme governance: milestones &amp; risk</a:t>
-            </a:r>
-          </a:p>
-        </p:txBody>
-      </p:sp>
-      <p:sp>
-        <p:nvSpPr>
-          <p:cNvPr id="5" name="Text Placeholder 4"/>
-          <p:cNvSpPr>
-            <a:spLocks noGrp="1"/>
-          </p:cNvSpPr>
-          <p:nvPr>
-            <p:ph type="body" idx="14" sz="quarter"/>
+          <a:p/>
+        </p:txBody>
+      </p:sp>
+      <p:sp>
+        <p:nvSpPr>
+          <p:cNvPr id="5" name="Content Placeholder 4"/>
+          <p:cNvSpPr>
+            <a:spLocks noGrp="1"/>
+          </p:cNvSpPr>
+          <p:nvPr>
+            <p:ph idx="20" sz="quarter"/>
           </p:nvPr>
         </p:nvSpPr>
         <p:spPr/>
         <p:txBody>
           <a:bodyPr/>
           <a:lstStyle/>
-          <a:p>
-            <a:pPr>
-              <a:spcBef>
-                <a:spcPts val="400"/>
-              </a:spcBef>
-            </a:pPr>
-            <a:r>
-              <a:rPr>
-                <a:latin typeface="Arial"/>
-              </a:rPr>
-              <a:t>Technical governance: standards &amp; assurance</a:t>
-            </a:r>
-          </a:p>
-        </p:txBody>
-      </p:sp>
-      <p:sp>
-        <p:nvSpPr>
-          <p:cNvPr id="6" name="Text Placeholder 5"/>
-          <p:cNvSpPr>
-            <a:spLocks noGrp="1"/>
-          </p:cNvSpPr>
-          <p:nvPr>
-            <p:ph type="body" idx="15" sz="quarter"/>
+          <a:p/>
+        </p:txBody>
+      </p:sp>
+      <p:sp>
+        <p:nvSpPr>
+          <p:cNvPr id="6" name="Content Placeholder 5"/>
+          <p:cNvSpPr>
+            <a:spLocks noGrp="1"/>
+          </p:cNvSpPr>
+          <p:nvPr>
+            <p:ph idx="19" sz="quarter"/>
           </p:nvPr>
         </p:nvSpPr>
         <p:spPr/>
         <p:txBody>
           <a:bodyPr/>
           <a:lstStyle/>
-          <a:p>
-            <a:pPr>
-              <a:spcBef>
-                <a:spcPts val="400"/>
-              </a:spcBef>
-            </a:pPr>
-            <a:r>
-              <a:rPr>
-                <a:latin typeface="Arial"/>
-              </a:rPr>
-              <a:t>Embedded risk management: proactive mitigation</a:t>
-            </a:r>
-          </a:p>
+          <a:p/>
         </p:txBody>
       </p:sp>
     </p:spTree>
@@ -15978,7 +15898,7 @@
           <a:lstStyle/>
           <a:p>
             <a:r>
-              <a:t>Proven outcomes in UK public sector transformation</a:t>
+              <a:t>Proven DDaT outcomes across UK public sector</a:t>
             </a:r>
           </a:p>
         </p:txBody>
@@ -16008,7 +15928,49 @@
               <a:rPr>
                 <a:latin typeface="Arial"/>
               </a:rPr>
-              <a:t>IBM and Stable delivered successful DDaT programmes for UK public sector clients.</a:t>
+              <a:t>Environment Agency: unified data platform in 11 months</a:t>
+            </a:r>
+          </a:p>
+          <a:p>
+            <a:pPr>
+              <a:spcBef>
+                <a:spcPts val="400"/>
+              </a:spcBef>
+              <a:buChar char="•"/>
+            </a:pPr>
+            <a:r>
+              <a:rPr>
+                <a:latin typeface="Arial"/>
+              </a:rPr>
+              <a:t>DVLA: 30% faster data processing</a:t>
+            </a:r>
+          </a:p>
+          <a:p>
+            <a:pPr>
+              <a:spcBef>
+                <a:spcPts val="400"/>
+              </a:spcBef>
+              <a:buChar char="•"/>
+            </a:pPr>
+            <a:r>
+              <a:rPr>
+                <a:latin typeface="Arial"/>
+              </a:rPr>
+              <a:t>Welsh charities: bilingual digital services</a:t>
+            </a:r>
+          </a:p>
+          <a:p>
+            <a:pPr>
+              <a:spcBef>
+                <a:spcPts val="400"/>
+              </a:spcBef>
+              <a:buChar char="•"/>
+            </a:pPr>
+            <a:r>
+              <a:rPr>
+                <a:latin typeface="Arial"/>
+              </a:rPr>
+              <a:t>NHS Digital: 18-month integration programme</a:t>
             </a:r>
           </a:p>
         </p:txBody>
@@ -16086,7 +16048,7 @@
           <a:lstStyle/>
           <a:p>
             <a:r>
-              <a:t>Customer Platform discovery to shape a delivery roadmap</a:t>
+              <a:t>Customer Platform discovery to shape roadmap</a:t>
             </a:r>
           </a:p>
         </p:txBody>
@@ -16116,7 +16078,7 @@
               <a:rPr>
                 <a:latin typeface="Arial"/>
               </a:rPr>
-              <a:t>Embed IBM + Stable team with NRW stakeholders</a:t>
+              <a:t>Blended IBM + Stable team embedded with NRW</a:t>
             </a:r>
           </a:p>
           <a:p>
@@ -16130,7 +16092,7 @@
               <a:rPr>
                 <a:latin typeface="Arial"/>
               </a:rPr>
-              <a:t>Run three parallel workstreams: user, technical, commercial</a:t>
+              <a:t>Three parallel workstreams: user, technical, commercial</a:t>
             </a:r>
           </a:p>
           <a:p>
@@ -16144,25 +16106,9 @@
               <a:rPr>
                 <a:latin typeface="Arial"/>
               </a:rPr>
-              <a:t>Mobilise discovery to shape the target roadmap</a:t>
-            </a:r>
-          </a:p>
-        </p:txBody>
-      </p:sp>
-      <p:sp>
-        <p:nvSpPr>
-          <p:cNvPr id="4" name="Text Placeholder 3"/>
-          <p:cNvSpPr>
-            <a:spLocks noGrp="1"/>
-          </p:cNvSpPr>
-          <p:nvPr>
-            <p:ph type="body" idx="12" sz="quarter"/>
-          </p:nvPr>
-        </p:nvSpPr>
-        <p:spPr/>
-        <p:txBody>
-          <a:bodyPr/>
-          <a:lstStyle/>
+              <a:t>Discovery mobilises and shapes the roadmap</a:t>
+            </a:r>
+          </a:p>
           <a:p>
             <a:pPr>
               <a:spcBef>
@@ -16174,9 +16120,25 @@
               <a:rPr>
                 <a:latin typeface="Arial"/>
               </a:rPr>
-              <a:t>Validate needs and operational context locally</a:t>
-            </a:r>
-          </a:p>
+              <a:t>Stakeholder engagement and operational context</a:t>
+            </a:r>
+          </a:p>
+        </p:txBody>
+      </p:sp>
+      <p:sp>
+        <p:nvSpPr>
+          <p:cNvPr id="4" name="Text Placeholder 3"/>
+          <p:cNvSpPr>
+            <a:spLocks noGrp="1"/>
+          </p:cNvSpPr>
+          <p:nvPr>
+            <p:ph type="body" idx="12" sz="quarter"/>
+          </p:nvPr>
+        </p:nvSpPr>
+        <p:spPr/>
+        <p:txBody>
+          <a:bodyPr/>
+          <a:lstStyle/>
           <a:p>
             <a:pPr>
               <a:spcBef>
@@ -16188,7 +16150,7 @@
               <a:rPr>
                 <a:latin typeface="Arial"/>
               </a:rPr>
-              <a:t>Assess Microsoft ecosystem fit and technical options</a:t>
+              <a:t>User research, service mapping, analytics</a:t>
             </a:r>
           </a:p>
           <a:p>
@@ -16202,7 +16164,35 @@
               <a:rPr>
                 <a:latin typeface="Arial"/>
               </a:rPr>
-              <a:t>Define commercial model and delivery sequencing</a:t>
+              <a:t>Technical assessment of the Microsoft ecosystem</a:t>
+            </a:r>
+          </a:p>
+          <a:p>
+            <a:pPr>
+              <a:spcBef>
+                <a:spcPts val="400"/>
+              </a:spcBef>
+              <a:buChar char="•"/>
+            </a:pPr>
+            <a:r>
+              <a:rPr>
+                <a:latin typeface="Arial"/>
+              </a:rPr>
+              <a:t>Commercial review and delivery sequencing</a:t>
+            </a:r>
+          </a:p>
+          <a:p>
+            <a:pPr>
+              <a:spcBef>
+                <a:spcPts val="400"/>
+              </a:spcBef>
+              <a:buChar char="•"/>
+            </a:pPr>
+            <a:r>
+              <a:rPr>
+                <a:latin typeface="Arial"/>
+              </a:rPr>
+              <a:t>Evidence-based investment decisions</a:t>
             </a:r>
           </a:p>
         </p:txBody>
@@ -16396,96 +16386,76 @@
           <a:lstStyle/>
           <a:p>
             <a:r>
-              <a:t>Foundational architecture for NRW on the Microsoft ecosystem</a:t>
-            </a:r>
-          </a:p>
-        </p:txBody>
-      </p:sp>
-      <p:sp>
-        <p:nvSpPr>
-          <p:cNvPr id="3" name="Text Placeholder 2"/>
-          <p:cNvSpPr>
-            <a:spLocks noGrp="1"/>
-          </p:cNvSpPr>
-          <p:nvPr>
-            <p:ph type="body" idx="13" sz="quarter"/>
+              <a:t>Foundational architecture for NRW on Microsoft</a:t>
+            </a:r>
+          </a:p>
+        </p:txBody>
+      </p:sp>
+      <p:sp>
+        <p:nvSpPr>
+          <p:cNvPr id="3" name="Content Placeholder 2"/>
+          <p:cNvSpPr>
+            <a:spLocks noGrp="1"/>
+          </p:cNvSpPr>
+          <p:nvPr>
+            <p:ph idx="17" sz="quarter"/>
           </p:nvPr>
         </p:nvSpPr>
         <p:spPr/>
         <p:txBody>
           <a:bodyPr/>
           <a:lstStyle/>
-          <a:p>
-            <a:pPr>
-              <a:spcBef>
-                <a:spcPts val="400"/>
-              </a:spcBef>
-              <a:buChar char="•"/>
-            </a:pPr>
-            <a:r>
-              <a:rPr>
-                <a:latin typeface="Arial"/>
-              </a:rPr>
-              <a:t>Layer 1: Engagement — channels and customer touchpoints</a:t>
-            </a:r>
-          </a:p>
-          <a:p>
-            <a:pPr>
-              <a:spcBef>
-                <a:spcPts val="400"/>
-              </a:spcBef>
-              <a:buChar char="•"/>
-            </a:pPr>
-            <a:r>
-              <a:rPr>
-                <a:latin typeface="Arial"/>
-              </a:rPr>
-              <a:t>Layer 2: CRM — Dynamics 365 as authoritative customer domain</a:t>
-            </a:r>
-          </a:p>
-          <a:p>
-            <a:pPr>
-              <a:spcBef>
-                <a:spcPts val="400"/>
-              </a:spcBef>
-              <a:buChar char="•"/>
-            </a:pPr>
-            <a:r>
-              <a:rPr>
-                <a:latin typeface="Arial"/>
-              </a:rPr>
-              <a:t>Layer 3: Integration — Azure services for orchestration and APIs</a:t>
-            </a:r>
-          </a:p>
-          <a:p>
-            <a:pPr>
-              <a:spcBef>
-                <a:spcPts val="400"/>
-              </a:spcBef>
-              <a:buChar char="•"/>
-            </a:pPr>
-            <a:r>
-              <a:rPr>
-                <a:latin typeface="Arial"/>
-              </a:rPr>
-              <a:t>Layer 4: Data — analytics and insights from the data platform</a:t>
-            </a:r>
-          </a:p>
-        </p:txBody>
-      </p:sp>
-      <p:sp>
-        <p:nvSpPr>
-          <p:cNvPr id="4" name="Picture Placeholder 3"/>
-          <p:cNvSpPr>
-            <a:spLocks noGrp="1"/>
-          </p:cNvSpPr>
-          <p:nvPr>
-            <p:ph type="pic" idx="14" sz="quarter"/>
-          </p:nvPr>
-        </p:nvSpPr>
-        <p:spPr/>
-        <p:txBody>
-          <a:bodyPr/>
+          <a:p/>
+        </p:txBody>
+      </p:sp>
+      <p:sp>
+        <p:nvSpPr>
+          <p:cNvPr id="4" name="Content Placeholder 3"/>
+          <p:cNvSpPr>
+            <a:spLocks noGrp="1"/>
+          </p:cNvSpPr>
+          <p:nvPr>
+            <p:ph idx="18" sz="quarter"/>
+          </p:nvPr>
+        </p:nvSpPr>
+        <p:spPr/>
+        <p:txBody>
+          <a:bodyPr/>
+          <a:lstStyle/>
+          <a:p/>
+        </p:txBody>
+      </p:sp>
+      <p:sp>
+        <p:nvSpPr>
+          <p:cNvPr id="5" name="Content Placeholder 4"/>
+          <p:cNvSpPr>
+            <a:spLocks noGrp="1"/>
+          </p:cNvSpPr>
+          <p:nvPr>
+            <p:ph idx="20" sz="quarter"/>
+          </p:nvPr>
+        </p:nvSpPr>
+        <p:spPr/>
+        <p:txBody>
+          <a:bodyPr/>
+          <a:lstStyle/>
+          <a:p/>
+        </p:txBody>
+      </p:sp>
+      <p:sp>
+        <p:nvSpPr>
+          <p:cNvPr id="6" name="Content Placeholder 5"/>
+          <p:cNvSpPr>
+            <a:spLocks noGrp="1"/>
+          </p:cNvSpPr>
+          <p:nvPr>
+            <p:ph idx="19" sz="quarter"/>
+          </p:nvPr>
+        </p:nvSpPr>
+        <p:spPr/>
+        <p:txBody>
+          <a:bodyPr/>
+          <a:lstStyle/>
           <a:p/>
         </p:txBody>
       </p:sp>
@@ -16523,125 +16493,77 @@
           <a:lstStyle/>
           <a:p>
             <a:r>
-              <a:t>Key architectural principles for platform evolution</a:t>
-            </a:r>
-          </a:p>
-        </p:txBody>
-      </p:sp>
-      <p:sp>
-        <p:nvSpPr>
-          <p:cNvPr id="3" name="Text Placeholder 2"/>
-          <p:cNvSpPr>
-            <a:spLocks noGrp="1"/>
-          </p:cNvSpPr>
-          <p:nvPr>
-            <p:ph type="body" idx="12" sz="quarter"/>
+              <a:t>Architectural principles for platform evolution</a:t>
+            </a:r>
+          </a:p>
+        </p:txBody>
+      </p:sp>
+      <p:sp>
+        <p:nvSpPr>
+          <p:cNvPr id="3" name="Content Placeholder 2"/>
+          <p:cNvSpPr>
+            <a:spLocks noGrp="1"/>
+          </p:cNvSpPr>
+          <p:nvPr>
+            <p:ph idx="17" sz="quarter"/>
           </p:nvPr>
         </p:nvSpPr>
         <p:spPr/>
         <p:txBody>
           <a:bodyPr/>
           <a:lstStyle/>
-          <a:p>
-            <a:pPr>
-              <a:spcBef>
-                <a:spcPts val="400"/>
-              </a:spcBef>
-            </a:pPr>
-            <a:r>
-              <a:rPr>
-                <a:latin typeface="Arial"/>
-              </a:rPr>
-              <a:t>Cloud-first, SaaS-preferred, managed services</a:t>
-            </a:r>
-          </a:p>
-        </p:txBody>
-      </p:sp>
-      <p:sp>
-        <p:nvSpPr>
-          <p:cNvPr id="4" name="Text Placeholder 3"/>
-          <p:cNvSpPr>
-            <a:spLocks noGrp="1"/>
-          </p:cNvSpPr>
-          <p:nvPr>
-            <p:ph type="body" idx="13" sz="quarter"/>
+          <a:p/>
+        </p:txBody>
+      </p:sp>
+      <p:sp>
+        <p:nvSpPr>
+          <p:cNvPr id="4" name="Content Placeholder 3"/>
+          <p:cNvSpPr>
+            <a:spLocks noGrp="1"/>
+          </p:cNvSpPr>
+          <p:nvPr>
+            <p:ph idx="18" sz="quarter"/>
           </p:nvPr>
         </p:nvSpPr>
         <p:spPr/>
         <p:txBody>
           <a:bodyPr/>
           <a:lstStyle/>
-          <a:p>
-            <a:pPr>
-              <a:spcBef>
-                <a:spcPts val="400"/>
-              </a:spcBef>
-            </a:pPr>
-            <a:r>
-              <a:rPr>
-                <a:latin typeface="Arial"/>
-              </a:rPr>
-              <a:t>Modularity and loose coupling</a:t>
-            </a:r>
-          </a:p>
-        </p:txBody>
-      </p:sp>
-      <p:sp>
-        <p:nvSpPr>
-          <p:cNvPr id="5" name="Text Placeholder 4"/>
-          <p:cNvSpPr>
-            <a:spLocks noGrp="1"/>
-          </p:cNvSpPr>
-          <p:nvPr>
-            <p:ph type="body" idx="14" sz="quarter"/>
+          <a:p/>
+        </p:txBody>
+      </p:sp>
+      <p:sp>
+        <p:nvSpPr>
+          <p:cNvPr id="5" name="Content Placeholder 4"/>
+          <p:cNvSpPr>
+            <a:spLocks noGrp="1"/>
+          </p:cNvSpPr>
+          <p:nvPr>
+            <p:ph idx="20" sz="quarter"/>
           </p:nvPr>
         </p:nvSpPr>
         <p:spPr/>
         <p:txBody>
           <a:bodyPr/>
           <a:lstStyle/>
-          <a:p>
-            <a:pPr>
-              <a:spcBef>
-                <a:spcPts val="400"/>
-              </a:spcBef>
-            </a:pPr>
-            <a:r>
-              <a:rPr>
-                <a:latin typeface="Arial"/>
-              </a:rPr>
-              <a:t>API-first and event-driven patterns</a:t>
-            </a:r>
-          </a:p>
-        </p:txBody>
-      </p:sp>
-      <p:sp>
-        <p:nvSpPr>
-          <p:cNvPr id="6" name="Text Placeholder 5"/>
-          <p:cNvSpPr>
-            <a:spLocks noGrp="1"/>
-          </p:cNvSpPr>
-          <p:nvPr>
-            <p:ph type="body" idx="15" sz="quarter"/>
+          <a:p/>
+        </p:txBody>
+      </p:sp>
+      <p:sp>
+        <p:nvSpPr>
+          <p:cNvPr id="6" name="Content Placeholder 5"/>
+          <p:cNvSpPr>
+            <a:spLocks noGrp="1"/>
+          </p:cNvSpPr>
+          <p:nvPr>
+            <p:ph idx="19" sz="quarter"/>
           </p:nvPr>
         </p:nvSpPr>
         <p:spPr/>
         <p:txBody>
           <a:bodyPr/>
           <a:lstStyle/>
-          <a:p>
-            <a:pPr>
-              <a:spcBef>
-                <a:spcPts val="400"/>
-              </a:spcBef>
-            </a:pPr>
-            <a:r>
-              <a:rPr>
-                <a:latin typeface="Arial"/>
-              </a:rPr>
-              <a:t>Data governance, security and privacy by design</a:t>
-            </a:r>
-          </a:p>
+          <a:p/>
         </p:txBody>
       </p:sp>
     </p:spTree>
@@ -16678,7 +16600,7 @@
           <a:lstStyle/>
           <a:p>
             <a:r>
-              <a:t>Addressing customer data fragmentation</a:t>
+              <a:t>Solving Customer Data Fragmentation</a:t>
             </a:r>
           </a:p>
         </p:txBody>
@@ -16736,7 +16658,7 @@
               <a:rPr>
                 <a:latin typeface="Arial"/>
               </a:rPr>
-              <a:t>Fragmented user journeys and experiences</a:t>
+              <a:t>Fragmented journeys and touchpoints</a:t>
             </a:r>
           </a:p>
           <a:p>
@@ -16750,7 +16672,7 @@
               <a:rPr>
                 <a:latin typeface="Arial"/>
               </a:rPr>
-              <a:t>Lack of real-time, coherent customer view</a:t>
+              <a:t>No real-time, coherent customer view</a:t>
             </a:r>
           </a:p>
         </p:txBody>
@@ -16789,7 +16711,7 @@
           <a:lstStyle/>
           <a:p>
             <a:r>
-              <a:t>Governed data integration, platform-first</a:t>
+              <a:t>Data integration &amp; platform thinking</a:t>
             </a:r>
           </a:p>
         </p:txBody>
@@ -16833,7 +16755,7 @@
               <a:rPr>
                 <a:latin typeface="Arial"/>
               </a:rPr>
-              <a:t>Establish a shared customer identifier model</a:t>
+              <a:t>Introduce a shared customer identifier model</a:t>
             </a:r>
           </a:p>
           <a:p>
@@ -16861,7 +16783,7 @@
               <a:rPr>
                 <a:latin typeface="Arial"/>
               </a:rPr>
-              <a:t>API-based integration for near real-time updates</a:t>
+              <a:t>API-based integration for real-time data</a:t>
             </a:r>
           </a:p>
         </p:txBody>
@@ -16891,7 +16813,7 @@
               <a:rPr>
                 <a:latin typeface="Arial"/>
               </a:rPr>
-              <a:t>Consolidate via MDM and survivorship rules</a:t>
+              <a:t>Controlled consolidation via MDM and survivorship rules</a:t>
             </a:r>
           </a:p>
           <a:p>
@@ -16905,7 +16827,7 @@
               <a:rPr>
                 <a:latin typeface="Arial"/>
               </a:rPr>
-              <a:t>Build on an Azure-native data platform for analytics</a:t>
+              <a:t>Use an Azure-native data platform for analytics</a:t>
             </a:r>
           </a:p>
           <a:p>
@@ -17125,7 +17047,7 @@
           <a:lstStyle/>
           <a:p>
             <a:r>
-              <a:t>Data integration risks &amp; mitigations</a:t>
+              <a:t>Data integration risks: key mitigations</a:t>
             </a:r>
           </a:p>
         </p:txBody>
@@ -17155,7 +17077,7 @@
               <a:rPr>
                 <a:latin typeface="Arial"/>
               </a:rPr>
-              <a:t>Poor data quality lowers match accuracy</a:t>
+              <a:t>Profile &amp; validate data to improve match accuracy</a:t>
             </a:r>
           </a:p>
           <a:p>
@@ -17169,7 +17091,7 @@
               <a:rPr>
                 <a:latin typeface="Arial"/>
               </a:rPr>
-              <a:t>Hidden dependencies in legacy systems</a:t>
+              <a:t>Identify legacy dependencies early to avoid delivery delays</a:t>
             </a:r>
           </a:p>
           <a:p>
@@ -17183,9 +17105,25 @@
               <a:rPr>
                 <a:latin typeface="Arial"/>
               </a:rPr>
-              <a:t>Performance and security constraints</a:t>
-            </a:r>
-          </a:p>
+              <a:t>Apply performance &amp; security constraints to protect throughput</a:t>
+            </a:r>
+          </a:p>
+        </p:txBody>
+      </p:sp>
+      <p:sp>
+        <p:nvSpPr>
+          <p:cNvPr id="4" name="Text Placeholder 3"/>
+          <p:cNvSpPr>
+            <a:spLocks noGrp="1"/>
+          </p:cNvSpPr>
+          <p:nvPr>
+            <p:ph type="body" idx="12" sz="quarter"/>
+          </p:nvPr>
+        </p:nvSpPr>
+        <p:spPr/>
+        <p:txBody>
+          <a:bodyPr/>
+          <a:lstStyle/>
           <a:p>
             <a:pPr>
               <a:spcBef>
@@ -17197,25 +17135,9 @@
               <a:rPr>
                 <a:latin typeface="Arial"/>
               </a:rPr>
-              <a:t>Unclear ownership of customer data</a:t>
-            </a:r>
-          </a:p>
-        </p:txBody>
-      </p:sp>
-      <p:sp>
-        <p:nvSpPr>
-          <p:cNvPr id="4" name="Text Placeholder 3"/>
-          <p:cNvSpPr>
-            <a:spLocks noGrp="1"/>
-          </p:cNvSpPr>
-          <p:nvPr>
-            <p:ph type="body" idx="12" sz="quarter"/>
-          </p:nvPr>
-        </p:nvSpPr>
-        <p:spPr/>
-        <p:txBody>
-          <a:bodyPr/>
-          <a:lstStyle/>
+              <a:t>Define ownership to strengthen governance and accountability</a:t>
+            </a:r>
+          </a:p>
           <a:p>
             <a:pPr>
               <a:spcBef>
@@ -17227,7 +17149,7 @@
               <a:rPr>
                 <a:latin typeface="Arial"/>
               </a:rPr>
-              <a:t>Profile and validate before integration</a:t>
+              <a:t>Use an integration layer to wrap legacy systems</a:t>
             </a:r>
           </a:p>
           <a:p>
@@ -17241,7 +17163,7 @@
               <a:rPr>
                 <a:latin typeface="Arial"/>
               </a:rPr>
-              <a:t>Add an integration layer around legacy</a:t>
+              <a:t>Adopt API-driven connectivity with strong governance</a:t>
             </a:r>
           </a:p>
           <a:p>
@@ -17255,21 +17177,7 @@
               <a:rPr>
                 <a:latin typeface="Arial"/>
               </a:rPr>
-              <a:t>Use API connectivity with strong governance</a:t>
-            </a:r>
-          </a:p>
-          <a:p>
-            <a:pPr>
-              <a:spcBef>
-                <a:spcPts val="400"/>
-              </a:spcBef>
-              <a:buChar char="•"/>
-            </a:pPr>
-            <a:r>
-              <a:rPr>
-                <a:latin typeface="Arial"/>
-              </a:rPr>
-              <a:t>Resolve identity early; sequence by risk</a:t>
+              <a:t>Sequence identity resolution by risk, then scale</a:t>
             </a:r>
           </a:p>
         </p:txBody>
@@ -17308,125 +17216,77 @@
           <a:lstStyle/>
           <a:p>
             <a:r>
-              <a:t>Multidisciplinary delivery teams</a:t>
-            </a:r>
-          </a:p>
-        </p:txBody>
-      </p:sp>
-      <p:sp>
-        <p:nvSpPr>
-          <p:cNvPr id="3" name="Text Placeholder 2"/>
-          <p:cNvSpPr>
-            <a:spLocks noGrp="1"/>
-          </p:cNvSpPr>
-          <p:nvPr>
-            <p:ph type="body" idx="12" sz="quarter"/>
+              <a:t>Multidisciplinary delivery team structure</a:t>
+            </a:r>
+          </a:p>
+        </p:txBody>
+      </p:sp>
+      <p:sp>
+        <p:nvSpPr>
+          <p:cNvPr id="3" name="Content Placeholder 2"/>
+          <p:cNvSpPr>
+            <a:spLocks noGrp="1"/>
+          </p:cNvSpPr>
+          <p:nvPr>
+            <p:ph idx="17" sz="quarter"/>
           </p:nvPr>
         </p:nvSpPr>
         <p:spPr/>
         <p:txBody>
           <a:bodyPr/>
           <a:lstStyle/>
-          <a:p>
-            <a:pPr>
-              <a:spcBef>
-                <a:spcPts val="400"/>
-              </a:spcBef>
-            </a:pPr>
-            <a:r>
-              <a:rPr>
-                <a:latin typeface="Arial"/>
-              </a:rPr>
-              <a:t>Service design, business analysis, architecture</a:t>
-            </a:r>
-          </a:p>
-        </p:txBody>
-      </p:sp>
-      <p:sp>
-        <p:nvSpPr>
-          <p:cNvPr id="4" name="Text Placeholder 3"/>
-          <p:cNvSpPr>
-            <a:spLocks noGrp="1"/>
-          </p:cNvSpPr>
-          <p:nvPr>
-            <p:ph type="body" idx="13" sz="quarter"/>
+          <a:p/>
+        </p:txBody>
+      </p:sp>
+      <p:sp>
+        <p:nvSpPr>
+          <p:cNvPr id="4" name="Content Placeholder 3"/>
+          <p:cNvSpPr>
+            <a:spLocks noGrp="1"/>
+          </p:cNvSpPr>
+          <p:nvPr>
+            <p:ph idx="18" sz="quarter"/>
           </p:nvPr>
         </p:nvSpPr>
         <p:spPr/>
         <p:txBody>
           <a:bodyPr/>
           <a:lstStyle/>
-          <a:p>
-            <a:pPr>
-              <a:spcBef>
-                <a:spcPts val="400"/>
-              </a:spcBef>
-            </a:pPr>
-            <a:r>
-              <a:rPr>
-                <a:latin typeface="Arial"/>
-              </a:rPr>
-              <a:t>Platform engineering, data specialists, product management</a:t>
-            </a:r>
-          </a:p>
-        </p:txBody>
-      </p:sp>
-      <p:sp>
-        <p:nvSpPr>
-          <p:cNvPr id="5" name="Text Placeholder 4"/>
-          <p:cNvSpPr>
-            <a:spLocks noGrp="1"/>
-          </p:cNvSpPr>
-          <p:nvPr>
-            <p:ph type="body" idx="14" sz="quarter"/>
+          <a:p/>
+        </p:txBody>
+      </p:sp>
+      <p:sp>
+        <p:nvSpPr>
+          <p:cNvPr id="5" name="Content Placeholder 4"/>
+          <p:cNvSpPr>
+            <a:spLocks noGrp="1"/>
+          </p:cNvSpPr>
+          <p:nvPr>
+            <p:ph idx="20" sz="quarter"/>
           </p:nvPr>
         </p:nvSpPr>
         <p:spPr/>
         <p:txBody>
           <a:bodyPr/>
           <a:lstStyle/>
-          <a:p>
-            <a:pPr>
-              <a:spcBef>
-                <a:spcPts val="400"/>
-              </a:spcBef>
-            </a:pPr>
-            <a:r>
-              <a:rPr>
-                <a:latin typeface="Arial"/>
-              </a:rPr>
-              <a:t>UX research, security, governance</a:t>
-            </a:r>
-          </a:p>
-        </p:txBody>
-      </p:sp>
-      <p:sp>
-        <p:nvSpPr>
-          <p:cNvPr id="6" name="Text Placeholder 5"/>
-          <p:cNvSpPr>
-            <a:spLocks noGrp="1"/>
-          </p:cNvSpPr>
-          <p:nvPr>
-            <p:ph type="body" idx="15" sz="quarter"/>
+          <a:p/>
+        </p:txBody>
+      </p:sp>
+      <p:sp>
+        <p:nvSpPr>
+          <p:cNvPr id="6" name="Content Placeholder 5"/>
+          <p:cNvSpPr>
+            <a:spLocks noGrp="1"/>
+          </p:cNvSpPr>
+          <p:nvPr>
+            <p:ph idx="19" sz="quarter"/>
           </p:nvPr>
         </p:nvSpPr>
         <p:spPr/>
         <p:txBody>
           <a:bodyPr/>
           <a:lstStyle/>
-          <a:p>
-            <a:pPr>
-              <a:spcBef>
-                <a:spcPts val="400"/>
-              </a:spcBef>
-            </a:pPr>
-            <a:r>
-              <a:rPr>
-                <a:latin typeface="Arial"/>
-              </a:rPr>
-              <a:t>Blended IBM/Stable teams with NRW staff</a:t>
-            </a:r>
-          </a:p>
+          <a:p/>
         </p:txBody>
       </p:sp>
     </p:spTree>
@@ -17463,125 +17323,77 @@
           <a:lstStyle/>
           <a:p>
             <a:r>
-              <a:t>Phased scaling and maturity pathway</a:t>
-            </a:r>
-          </a:p>
-        </p:txBody>
-      </p:sp>
-      <p:sp>
-        <p:nvSpPr>
-          <p:cNvPr id="3" name="Text Placeholder 2"/>
-          <p:cNvSpPr>
-            <a:spLocks noGrp="1"/>
-          </p:cNvSpPr>
-          <p:nvPr>
-            <p:ph type="body" idx="12" sz="quarter"/>
+              <a:t>Phased scaling &amp; maturity pathway</a:t>
+            </a:r>
+          </a:p>
+        </p:txBody>
+      </p:sp>
+      <p:sp>
+        <p:nvSpPr>
+          <p:cNvPr id="3" name="Content Placeholder 2"/>
+          <p:cNvSpPr>
+            <a:spLocks noGrp="1"/>
+          </p:cNvSpPr>
+          <p:nvPr>
+            <p:ph idx="17" sz="quarter"/>
           </p:nvPr>
         </p:nvSpPr>
         <p:spPr/>
         <p:txBody>
           <a:bodyPr/>
           <a:lstStyle/>
-          <a:p>
-            <a:pPr>
-              <a:spcBef>
-                <a:spcPts val="400"/>
-              </a:spcBef>
-            </a:pPr>
-            <a:r>
-              <a:rPr>
-                <a:latin typeface="Arial"/>
-              </a:rPr>
-              <a:t>Alpha (Pilot): validate assumptions with pilot teams</a:t>
-            </a:r>
-          </a:p>
-        </p:txBody>
-      </p:sp>
-      <p:sp>
-        <p:nvSpPr>
-          <p:cNvPr id="4" name="Text Placeholder 3"/>
-          <p:cNvSpPr>
-            <a:spLocks noGrp="1"/>
-          </p:cNvSpPr>
-          <p:nvPr>
-            <p:ph type="body" idx="13" sz="quarter"/>
+          <a:p/>
+        </p:txBody>
+      </p:sp>
+      <p:sp>
+        <p:nvSpPr>
+          <p:cNvPr id="4" name="Content Placeholder 3"/>
+          <p:cNvSpPr>
+            <a:spLocks noGrp="1"/>
+          </p:cNvSpPr>
+          <p:nvPr>
+            <p:ph idx="18" sz="quarter"/>
           </p:nvPr>
         </p:nvSpPr>
         <p:spPr/>
         <p:txBody>
           <a:bodyPr/>
           <a:lstStyle/>
-          <a:p>
-            <a:pPr>
-              <a:spcBef>
-                <a:spcPts val="400"/>
-              </a:spcBef>
-            </a:pPr>
-            <a:r>
-              <a:rPr>
-                <a:latin typeface="Arial"/>
-              </a:rPr>
-              <a:t>Beta (Expand): scale capabilities via frequent iterations</a:t>
-            </a:r>
-          </a:p>
-        </p:txBody>
-      </p:sp>
-      <p:sp>
-        <p:nvSpPr>
-          <p:cNvPr id="5" name="Text Placeholder 4"/>
-          <p:cNvSpPr>
-            <a:spLocks noGrp="1"/>
-          </p:cNvSpPr>
-          <p:nvPr>
-            <p:ph type="body" idx="14" sz="quarter"/>
+          <a:p/>
+        </p:txBody>
+      </p:sp>
+      <p:sp>
+        <p:nvSpPr>
+          <p:cNvPr id="5" name="Content Placeholder 4"/>
+          <p:cNvSpPr>
+            <a:spLocks noGrp="1"/>
+          </p:cNvSpPr>
+          <p:nvPr>
+            <p:ph idx="20" sz="quarter"/>
           </p:nvPr>
         </p:nvSpPr>
         <p:spPr/>
         <p:txBody>
           <a:bodyPr/>
           <a:lstStyle/>
-          <a:p>
-            <a:pPr>
-              <a:spcBef>
-                <a:spcPts val="400"/>
-              </a:spcBef>
-            </a:pPr>
-            <a:r>
-              <a:rPr>
-                <a:latin typeface="Arial"/>
-              </a:rPr>
-              <a:t>Live (Operate): sustainable mix, maintenance, and operations</a:t>
-            </a:r>
-          </a:p>
-        </p:txBody>
-      </p:sp>
-      <p:sp>
-        <p:nvSpPr>
-          <p:cNvPr id="6" name="Text Placeholder 5"/>
-          <p:cNvSpPr>
-            <a:spLocks noGrp="1"/>
-          </p:cNvSpPr>
-          <p:nvPr>
-            <p:ph type="body" idx="15" sz="quarter"/>
+          <a:p/>
+        </p:txBody>
+      </p:sp>
+      <p:sp>
+        <p:nvSpPr>
+          <p:cNvPr id="6" name="Content Placeholder 5"/>
+          <p:cNvSpPr>
+            <a:spLocks noGrp="1"/>
+          </p:cNvSpPr>
+          <p:nvPr>
+            <p:ph idx="19" sz="quarter"/>
           </p:nvPr>
         </p:nvSpPr>
         <p:spPr/>
         <p:txBody>
           <a:bodyPr/>
           <a:lstStyle/>
-          <a:p>
-            <a:pPr>
-              <a:spcBef>
-                <a:spcPts val="400"/>
-              </a:spcBef>
-            </a:pPr>
-            <a:r>
-              <a:rPr>
-                <a:latin typeface="Arial"/>
-              </a:rPr>
-              <a:t>Retire (Transition): decommission with user engagement</a:t>
-            </a:r>
-          </a:p>
+          <a:p/>
         </p:txBody>
       </p:sp>
     </p:spTree>
@@ -17618,7 +17430,7 @@
           <a:lstStyle/>
           <a:p>
             <a:r>
-              <a:t>Security, testing &amp; service sustainability</a:t>
+              <a:t>Security, testing and service sustainability</a:t>
             </a:r>
           </a:p>
         </p:txBody>
@@ -17648,7 +17460,7 @@
               <a:rPr>
                 <a:latin typeface="Arial"/>
               </a:rPr>
-              <a:t>Embed security, privacy &amp; compliance from the start</a:t>
+              <a:t>Security, privacy &amp; compliance built in from day one</a:t>
             </a:r>
           </a:p>
           <a:p>
@@ -17662,7 +17474,7 @@
               <a:rPr>
                 <a:latin typeface="Arial"/>
               </a:rPr>
-              <a:t>Run structured threat modelling &amp; compliance analysis</a:t>
+              <a:t>Threat modelling + compliance analysis by design</a:t>
             </a:r>
           </a:p>
           <a:p>
@@ -17676,7 +17488,7 @@
               <a:rPr>
                 <a:latin typeface="Arial"/>
               </a:rPr>
-              <a:t>Apply proportionate, risk-based testing &amp; assurance</a:t>
+              <a:t>Risk-based testing and proportionate assurance</a:t>
             </a:r>
           </a:p>
           <a:p>
@@ -17690,7 +17502,7 @@
               <a:rPr>
                 <a:latin typeface="Arial"/>
               </a:rPr>
-              <a:t>Design for live-service operability</a:t>
+              <a:t>Operability for live services, not afterthought</a:t>
             </a:r>
           </a:p>
         </p:txBody>
@@ -17720,7 +17532,7 @@
               <a:rPr>
                 <a:latin typeface="Arial"/>
               </a:rPr>
-              <a:t>Align to UK GDPR and Cyber Essentials Plus</a:t>
+              <a:t>UK GDPR + Cyber Essentials Plus alignment</a:t>
             </a:r>
           </a:p>
           <a:p>
@@ -17734,7 +17546,7 @@
               <a:rPr>
                 <a:latin typeface="Arial"/>
               </a:rPr>
-              <a:t>Increase assurance for high-risk components</a:t>
+              <a:t>Extra assurance for high-risk components</a:t>
             </a:r>
           </a:p>
           <a:p>
@@ -17748,7 +17560,7 @@
               <a:rPr>
                 <a:latin typeface="Arial"/>
               </a:rPr>
-              <a:t>Enable continuous monitoring and resilience</a:t>
+              <a:t>Continuous monitoring and resilience</a:t>
             </a:r>
           </a:p>
           <a:p>
@@ -17762,7 +17574,7 @@
               <a:rPr>
                 <a:latin typeface="Arial"/>
               </a:rPr>
-              <a:t>Progressively transition to NRW ownership</a:t>
+              <a:t>Knowledge transfer for NRW ownership readiness</a:t>
             </a:r>
           </a:p>
         </p:txBody>
@@ -17840,7 +17652,7 @@
           <a:lstStyle/>
           <a:p>
             <a:r>
-              <a:t>12-week innovation window: test, validate, and scale what works</a:t>
+              <a:t>12-week innovation window</a:t>
             </a:r>
           </a:p>
         </p:txBody>
@@ -17879,125 +17691,77 @@
           <a:lstStyle/>
           <a:p>
             <a:r>
-              <a:t>Three innovation modes for website improvement</a:t>
-            </a:r>
-          </a:p>
-        </p:txBody>
-      </p:sp>
-      <p:sp>
-        <p:nvSpPr>
-          <p:cNvPr id="3" name="Text Placeholder 2"/>
-          <p:cNvSpPr>
-            <a:spLocks noGrp="1"/>
-          </p:cNvSpPr>
-          <p:nvPr>
-            <p:ph type="body" idx="12" sz="quarter"/>
+              <a:t>Website improvement innovation modes</a:t>
+            </a:r>
+          </a:p>
+        </p:txBody>
+      </p:sp>
+      <p:sp>
+        <p:nvSpPr>
+          <p:cNvPr id="3" name="Content Placeholder 2"/>
+          <p:cNvSpPr>
+            <a:spLocks noGrp="1"/>
+          </p:cNvSpPr>
+          <p:nvPr>
+            <p:ph idx="17" sz="quarter"/>
           </p:nvPr>
         </p:nvSpPr>
         <p:spPr/>
         <p:txBody>
           <a:bodyPr/>
           <a:lstStyle/>
-          <a:p>
-            <a:pPr>
-              <a:spcBef>
-                <a:spcPts val="400"/>
-              </a:spcBef>
-            </a:pPr>
-            <a:r>
-              <a:rPr>
-                <a:latin typeface="Arial"/>
-              </a:rPr>
-              <a:t>Discovery-led: identify viable opportunities</a:t>
-            </a:r>
-          </a:p>
-        </p:txBody>
-      </p:sp>
-      <p:sp>
-        <p:nvSpPr>
-          <p:cNvPr id="4" name="Text Placeholder 3"/>
-          <p:cNvSpPr>
-            <a:spLocks noGrp="1"/>
-          </p:cNvSpPr>
-          <p:nvPr>
-            <p:ph type="body" idx="13" sz="quarter"/>
+          <a:p/>
+        </p:txBody>
+      </p:sp>
+      <p:sp>
+        <p:nvSpPr>
+          <p:cNvPr id="4" name="Content Placeholder 3"/>
+          <p:cNvSpPr>
+            <a:spLocks noGrp="1"/>
+          </p:cNvSpPr>
+          <p:nvPr>
+            <p:ph idx="18" sz="quarter"/>
           </p:nvPr>
         </p:nvSpPr>
         <p:spPr/>
         <p:txBody>
           <a:bodyPr/>
           <a:lstStyle/>
-          <a:p>
-            <a:pPr>
-              <a:spcBef>
-                <a:spcPts val="400"/>
-              </a:spcBef>
-            </a:pPr>
-            <a:r>
-              <a:rPr>
-                <a:latin typeface="Arial"/>
-              </a:rPr>
-              <a:t>Proof-led: validate defined ideas</a:t>
-            </a:r>
-          </a:p>
-        </p:txBody>
-      </p:sp>
-      <p:sp>
-        <p:nvSpPr>
-          <p:cNvPr id="5" name="Text Placeholder 4"/>
-          <p:cNvSpPr>
-            <a:spLocks noGrp="1"/>
-          </p:cNvSpPr>
-          <p:nvPr>
-            <p:ph type="body" idx="14" sz="quarter"/>
+          <a:p/>
+        </p:txBody>
+      </p:sp>
+      <p:sp>
+        <p:nvSpPr>
+          <p:cNvPr id="5" name="Content Placeholder 4"/>
+          <p:cNvSpPr>
+            <a:spLocks noGrp="1"/>
+          </p:cNvSpPr>
+          <p:nvPr>
+            <p:ph idx="20" sz="quarter"/>
           </p:nvPr>
         </p:nvSpPr>
         <p:spPr/>
         <p:txBody>
           <a:bodyPr/>
           <a:lstStyle/>
-          <a:p>
-            <a:pPr>
-              <a:spcBef>
-                <a:spcPts val="400"/>
-              </a:spcBef>
-            </a:pPr>
-            <a:r>
-              <a:rPr>
-                <a:latin typeface="Arial"/>
-              </a:rPr>
-              <a:t>Optimisation-led: improve known pain points</a:t>
-            </a:r>
-          </a:p>
-        </p:txBody>
-      </p:sp>
-      <p:sp>
-        <p:nvSpPr>
-          <p:cNvPr id="6" name="Text Placeholder 5"/>
-          <p:cNvSpPr>
-            <a:spLocks noGrp="1"/>
-          </p:cNvSpPr>
-          <p:nvPr>
-            <p:ph type="body" idx="15" sz="quarter"/>
+          <a:p/>
+        </p:txBody>
+      </p:sp>
+      <p:sp>
+        <p:nvSpPr>
+          <p:cNvPr id="6" name="Content Placeholder 5"/>
+          <p:cNvSpPr>
+            <a:spLocks noGrp="1"/>
+          </p:cNvSpPr>
+          <p:nvPr>
+            <p:ph idx="19" sz="quarter"/>
           </p:nvPr>
         </p:nvSpPr>
         <p:spPr/>
         <p:txBody>
           <a:bodyPr/>
           <a:lstStyle/>
-          <a:p>
-            <a:pPr>
-              <a:spcBef>
-                <a:spcPts val="400"/>
-              </a:spcBef>
-            </a:pPr>
-            <a:r>
-              <a:rPr>
-                <a:latin typeface="Arial"/>
-              </a:rPr>
-              <a:t>Rapid learning and evidence-driven decisions</a:t>
-            </a:r>
-          </a:p>
+          <a:p/>
         </p:txBody>
       </p:sp>
     </p:spTree>
@@ -18034,125 +17798,77 @@
           <a:lstStyle/>
           <a:p>
             <a:r>
-              <a:t>Four phases to generate evidence and drive decisions</a:t>
-            </a:r>
-          </a:p>
-        </p:txBody>
-      </p:sp>
-      <p:sp>
-        <p:nvSpPr>
-          <p:cNvPr id="3" name="Text Placeholder 2"/>
-          <p:cNvSpPr>
-            <a:spLocks noGrp="1"/>
-          </p:cNvSpPr>
-          <p:nvPr>
-            <p:ph type="body" idx="12" sz="quarter"/>
+              <a:t>Evidence generation: four phases</a:t>
+            </a:r>
+          </a:p>
+        </p:txBody>
+      </p:sp>
+      <p:sp>
+        <p:nvSpPr>
+          <p:cNvPr id="3" name="Content Placeholder 2"/>
+          <p:cNvSpPr>
+            <a:spLocks noGrp="1"/>
+          </p:cNvSpPr>
+          <p:nvPr>
+            <p:ph idx="17" sz="quarter"/>
           </p:nvPr>
         </p:nvSpPr>
         <p:spPr/>
         <p:txBody>
           <a:bodyPr/>
           <a:lstStyle/>
-          <a:p>
-            <a:pPr>
-              <a:spcBef>
-                <a:spcPts val="400"/>
-              </a:spcBef>
-            </a:pPr>
-            <a:r>
-              <a:rPr>
-                <a:latin typeface="Arial"/>
-              </a:rPr>
-              <a:t>Explore &amp; Discover: define hypotheses and success signals</a:t>
-            </a:r>
-          </a:p>
-        </p:txBody>
-      </p:sp>
-      <p:sp>
-        <p:nvSpPr>
-          <p:cNvPr id="4" name="Text Placeholder 3"/>
-          <p:cNvSpPr>
-            <a:spLocks noGrp="1"/>
-          </p:cNvSpPr>
-          <p:nvPr>
-            <p:ph type="body" idx="13" sz="quarter"/>
+          <a:p/>
+        </p:txBody>
+      </p:sp>
+      <p:sp>
+        <p:nvSpPr>
+          <p:cNvPr id="4" name="Content Placeholder 3"/>
+          <p:cNvSpPr>
+            <a:spLocks noGrp="1"/>
+          </p:cNvSpPr>
+          <p:nvPr>
+            <p:ph idx="18" sz="quarter"/>
           </p:nvPr>
         </p:nvSpPr>
         <p:spPr/>
         <p:txBody>
           <a:bodyPr/>
           <a:lstStyle/>
-          <a:p>
-            <a:pPr>
-              <a:spcBef>
-                <a:spcPts val="400"/>
-              </a:spcBef>
-            </a:pPr>
-            <a:r>
-              <a:rPr>
-                <a:latin typeface="Arial"/>
-              </a:rPr>
-              <a:t>Ideate/Co-create: run low-cost experiments to learn fast</a:t>
-            </a:r>
-          </a:p>
-        </p:txBody>
-      </p:sp>
-      <p:sp>
-        <p:nvSpPr>
-          <p:cNvPr id="5" name="Text Placeholder 4"/>
-          <p:cNvSpPr>
-            <a:spLocks noGrp="1"/>
-          </p:cNvSpPr>
-          <p:nvPr>
-            <p:ph type="body" idx="14" sz="quarter"/>
+          <a:p/>
+        </p:txBody>
+      </p:sp>
+      <p:sp>
+        <p:nvSpPr>
+          <p:cNvPr id="5" name="Content Placeholder 4"/>
+          <p:cNvSpPr>
+            <a:spLocks noGrp="1"/>
+          </p:cNvSpPr>
+          <p:nvPr>
+            <p:ph idx="20" sz="quarter"/>
           </p:nvPr>
         </p:nvSpPr>
         <p:spPr/>
         <p:txBody>
           <a:bodyPr/>
           <a:lstStyle/>
-          <a:p>
-            <a:pPr>
-              <a:spcBef>
-                <a:spcPts val="400"/>
-              </a:spcBef>
-            </a:pPr>
-            <a:r>
-              <a:rPr>
-                <a:latin typeface="Arial"/>
-              </a:rPr>
-              <a:t>Design &amp; Build/Co-execute: deepen prototypes with evidence</a:t>
-            </a:r>
-          </a:p>
-        </p:txBody>
-      </p:sp>
-      <p:sp>
-        <p:nvSpPr>
-          <p:cNvPr id="6" name="Text Placeholder 5"/>
-          <p:cNvSpPr>
-            <a:spLocks noGrp="1"/>
-          </p:cNvSpPr>
-          <p:nvPr>
-            <p:ph type="body" idx="15" sz="quarter"/>
+          <a:p/>
+        </p:txBody>
+      </p:sp>
+      <p:sp>
+        <p:nvSpPr>
+          <p:cNvPr id="6" name="Content Placeholder 5"/>
+          <p:cNvSpPr>
+            <a:spLocks noGrp="1"/>
+          </p:cNvSpPr>
+          <p:nvPr>
+            <p:ph idx="19" sz="quarter"/>
           </p:nvPr>
         </p:nvSpPr>
         <p:spPr/>
         <p:txBody>
           <a:bodyPr/>
           <a:lstStyle/>
-          <a:p>
-            <a:pPr>
-              <a:spcBef>
-                <a:spcPts val="400"/>
-              </a:spcBef>
-            </a:pPr>
-            <a:r>
-              <a:rPr>
-                <a:latin typeface="Arial"/>
-              </a:rPr>
-              <a:t>Scale/Co-operate: consolidate results and decide next steps</a:t>
-            </a:r>
-          </a:p>
+          <a:p/>
         </p:txBody>
       </p:sp>
     </p:spTree>
@@ -18189,7 +17905,7 @@
           <a:lstStyle/>
           <a:p>
             <a:r>
-              <a:t>Evidence-led hypotheses with decision-ready success criteria</a:t>
+              <a:t>Evidence-based success criteria for hypothesis testing</a:t>
             </a:r>
           </a:p>
         </p:txBody>
@@ -18372,7 +18088,7 @@
           <a:lstStyle/>
           <a:p>
             <a:r>
-              <a:t>Innovation window: outputs and decision-ready deliverables</a:t>
+              <a:t>Innovation window: outputs and deliverables</a:t>
             </a:r>
           </a:p>
         </p:txBody>
@@ -18639,22 +18355,6 @@
               <a:t>Time-limited innovation window</a:t>
             </a:r>
           </a:p>
-        </p:txBody>
-      </p:sp>
-      <p:sp>
-        <p:nvSpPr>
-          <p:cNvPr id="4" name="Text Placeholder 3"/>
-          <p:cNvSpPr>
-            <a:spLocks noGrp="1"/>
-          </p:cNvSpPr>
-          <p:nvPr>
-            <p:ph type="body" idx="12" sz="quarter"/>
-          </p:nvPr>
-        </p:nvSpPr>
-        <p:spPr/>
-        <p:txBody>
-          <a:bodyPr/>
-          <a:lstStyle/>
           <a:p>
             <a:pPr>
               <a:spcBef>
@@ -18666,9 +18366,25 @@
               <a:rPr>
                 <a:latin typeface="Arial"/>
               </a:rPr>
-              <a:t>Stakeholder engagement required</a:t>
-            </a:r>
-          </a:p>
+              <a:t>Stakeholder engagement needed</a:t>
+            </a:r>
+          </a:p>
+        </p:txBody>
+      </p:sp>
+      <p:sp>
+        <p:nvSpPr>
+          <p:cNvPr id="4" name="Text Placeholder 3"/>
+          <p:cNvSpPr>
+            <a:spLocks noGrp="1"/>
+          </p:cNvSpPr>
+          <p:nvPr>
+            <p:ph type="body" idx="12" sz="quarter"/>
+          </p:nvPr>
+        </p:nvSpPr>
+        <p:spPr/>
+        <p:txBody>
+          <a:bodyPr/>
+          <a:lstStyle/>
           <a:p>
             <a:pPr>
               <a:spcBef>
@@ -18694,7 +18410,7 @@
               <a:rPr>
                 <a:latin typeface="Arial"/>
               </a:rPr>
-              <a:t>Test feasibility before scaling</a:t>
+              <a:t>Engage users and stakeholders upfront</a:t>
             </a:r>
           </a:p>
           <a:p>
@@ -18708,7 +18424,35 @@
               <a:rPr>
                 <a:latin typeface="Arial"/>
               </a:rPr>
-              <a:t>Measure, report, iterate</a:t>
+              <a:t>Test feasibility before scaling</a:t>
+            </a:r>
+          </a:p>
+          <a:p>
+            <a:pPr>
+              <a:spcBef>
+                <a:spcPts val="400"/>
+              </a:spcBef>
+              <a:buChar char="•"/>
+            </a:pPr>
+            <a:r>
+              <a:rPr>
+                <a:latin typeface="Arial"/>
+              </a:rPr>
+              <a:t>Dispose weak ideas with discipline</a:t>
+            </a:r>
+          </a:p>
+          <a:p>
+            <a:pPr>
+              <a:spcBef>
+                <a:spcPts val="400"/>
+              </a:spcBef>
+              <a:buChar char="•"/>
+            </a:pPr>
+            <a:r>
+              <a:rPr>
+                <a:latin typeface="Arial"/>
+              </a:rPr>
+              <a:t>Measure, report, and learn</a:t>
             </a:r>
           </a:p>
         </p:txBody>
@@ -18786,125 +18530,77 @@
           <a:lstStyle/>
           <a:p>
             <a:r>
-              <a:t>Embedding sustainability and social value in delivery</a:t>
-            </a:r>
-          </a:p>
-        </p:txBody>
-      </p:sp>
-      <p:sp>
-        <p:nvSpPr>
-          <p:cNvPr id="3" name="Text Placeholder 2"/>
-          <p:cNvSpPr>
-            <a:spLocks noGrp="1"/>
-          </p:cNvSpPr>
-          <p:nvPr>
-            <p:ph type="body" idx="12" sz="quarter"/>
+              <a:t>Sustainability &amp; social value in delivery</a:t>
+            </a:r>
+          </a:p>
+        </p:txBody>
+      </p:sp>
+      <p:sp>
+        <p:nvSpPr>
+          <p:cNvPr id="3" name="Content Placeholder 2"/>
+          <p:cNvSpPr>
+            <a:spLocks noGrp="1"/>
+          </p:cNvSpPr>
+          <p:nvPr>
+            <p:ph idx="17" sz="quarter"/>
           </p:nvPr>
         </p:nvSpPr>
         <p:spPr/>
         <p:txBody>
           <a:bodyPr/>
           <a:lstStyle/>
-          <a:p>
-            <a:pPr>
-              <a:spcBef>
-                <a:spcPts val="400"/>
-              </a:spcBef>
-            </a:pPr>
-            <a:r>
-              <a:rPr>
-                <a:latin typeface="Arial"/>
-              </a:rPr>
-              <a:t>Environmental impact reduction via cloud platforms</a:t>
-            </a:r>
-          </a:p>
-        </p:txBody>
-      </p:sp>
-      <p:sp>
-        <p:nvSpPr>
-          <p:cNvPr id="4" name="Text Placeholder 3"/>
-          <p:cNvSpPr>
-            <a:spLocks noGrp="1"/>
-          </p:cNvSpPr>
-          <p:nvPr>
-            <p:ph type="body" idx="13" sz="quarter"/>
+          <a:p/>
+        </p:txBody>
+      </p:sp>
+      <p:sp>
+        <p:nvSpPr>
+          <p:cNvPr id="4" name="Content Placeholder 3"/>
+          <p:cNvSpPr>
+            <a:spLocks noGrp="1"/>
+          </p:cNvSpPr>
+          <p:nvPr>
+            <p:ph idx="18" sz="quarter"/>
           </p:nvPr>
         </p:nvSpPr>
         <p:spPr/>
         <p:txBody>
           <a:bodyPr/>
           <a:lstStyle/>
-          <a:p>
-            <a:pPr>
-              <a:spcBef>
-                <a:spcPts val="400"/>
-              </a:spcBef>
-            </a:pPr>
-            <a:r>
-              <a:rPr>
-                <a:latin typeface="Arial"/>
-              </a:rPr>
-              <a:t>FinOps and GreenOps for cost and carbon visibility</a:t>
-            </a:r>
-          </a:p>
-        </p:txBody>
-      </p:sp>
-      <p:sp>
-        <p:nvSpPr>
-          <p:cNvPr id="5" name="Text Placeholder 4"/>
-          <p:cNvSpPr>
-            <a:spLocks noGrp="1"/>
-          </p:cNvSpPr>
-          <p:nvPr>
-            <p:ph type="body" idx="14" sz="quarter"/>
+          <a:p/>
+        </p:txBody>
+      </p:sp>
+      <p:sp>
+        <p:nvSpPr>
+          <p:cNvPr id="5" name="Content Placeholder 4"/>
+          <p:cNvSpPr>
+            <a:spLocks noGrp="1"/>
+          </p:cNvSpPr>
+          <p:nvPr>
+            <p:ph idx="20" sz="quarter"/>
           </p:nvPr>
         </p:nvSpPr>
         <p:spPr/>
         <p:txBody>
           <a:bodyPr/>
           <a:lstStyle/>
-          <a:p>
-            <a:pPr>
-              <a:spcBef>
-                <a:spcPts val="400"/>
-              </a:spcBef>
-            </a:pPr>
-            <a:r>
-              <a:rPr>
-                <a:latin typeface="Arial"/>
-              </a:rPr>
-              <a:t>Local employment and skills development</a:t>
-            </a:r>
-          </a:p>
-        </p:txBody>
-      </p:sp>
-      <p:sp>
-        <p:nvSpPr>
-          <p:cNvPr id="6" name="Text Placeholder 5"/>
-          <p:cNvSpPr>
-            <a:spLocks noGrp="1"/>
-          </p:cNvSpPr>
-          <p:nvPr>
-            <p:ph type="body" idx="15" sz="quarter"/>
+          <a:p/>
+        </p:txBody>
+      </p:sp>
+      <p:sp>
+        <p:nvSpPr>
+          <p:cNvPr id="6" name="Content Placeholder 5"/>
+          <p:cNvSpPr>
+            <a:spLocks noGrp="1"/>
+          </p:cNvSpPr>
+          <p:nvPr>
+            <p:ph idx="19" sz="quarter"/>
           </p:nvPr>
         </p:nvSpPr>
         <p:spPr/>
         <p:txBody>
           <a:bodyPr/>
           <a:lstStyle/>
-          <a:p>
-            <a:pPr>
-              <a:spcBef>
-                <a:spcPts val="400"/>
-              </a:spcBef>
-            </a:pPr>
-            <a:r>
-              <a:rPr>
-                <a:latin typeface="Arial"/>
-              </a:rPr>
-              <a:t>Welsh SME and social enterprise engagement</a:t>
-            </a:r>
-          </a:p>
+          <a:p/>
         </p:txBody>
       </p:sp>
     </p:spTree>
@@ -18941,7 +18637,7 @@
           <a:lstStyle/>
           <a:p>
             <a:r>
-              <a:t>Stable’s social value impact in Wales</a:t>
+              <a:t>Stable’s Social Value Impact in Wales</a:t>
             </a:r>
           </a:p>
         </p:txBody>
@@ -18971,7 +18667,7 @@
               <a:rPr>
                 <a:latin typeface="Arial"/>
               </a:rPr>
-              <a:t>Welsh-based teams supporting local employment</a:t>
+              <a:t>Local employment with Welsh-based teams</a:t>
             </a:r>
           </a:p>
           <a:p>
@@ -18985,7 +18681,7 @@
               <a:rPr>
                 <a:latin typeface="Arial"/>
               </a:rPr>
-              <a:t>Internship pathways with local universities</a:t>
+              <a:t>Internships with local universities</a:t>
             </a:r>
           </a:p>
           <a:p>
@@ -18999,7 +18695,7 @@
               <a:rPr>
                 <a:latin typeface="Arial"/>
               </a:rPr>
-              <a:t>Community engagement with charities</a:t>
+              <a:t>Charity partnerships and community engagement</a:t>
             </a:r>
           </a:p>
           <a:p>
@@ -19043,7 +18739,7 @@
               <a:rPr>
                 <a:latin typeface="Arial"/>
               </a:rPr>
-              <a:t>Partnerships with Welsh SMEs and social enterprises</a:t>
+              <a:t>Welsh SME and social enterprise partnerships</a:t>
             </a:r>
           </a:p>
           <a:p>
@@ -19071,7 +18767,7 @@
               <a:rPr>
                 <a:latin typeface="Arial"/>
               </a:rPr>
-              <a:t>Digital skills promotion in schools</a:t>
+              <a:t>Digital skills in schools</a:t>
             </a:r>
           </a:p>
           <a:p>
@@ -19085,7 +18781,7 @@
               <a:rPr>
                 <a:latin typeface="Arial"/>
               </a:rPr>
-              <a:t>Structured reporting and measurable outcomes</a:t>
+              <a:t>Transparent reporting and measurable outcomes</a:t>
             </a:r>
           </a:p>
         </p:txBody>
@@ -19124,7 +18820,7 @@
           <a:lstStyle/>
           <a:p>
             <a:r>
-              <a:t>Monitoring sustainability and social value performance</a:t>
+              <a:t>Sustainability &amp; social value performance monitoring</a:t>
             </a:r>
           </a:p>
         </p:txBody>
@@ -19168,7 +18864,7 @@
               <a:rPr>
                 <a:latin typeface="Arial"/>
               </a:rPr>
-              <a:t>Structured reporting aligned to framework governance</a:t>
+              <a:t>Structured reporting aligned to governance framework</a:t>
             </a:r>
           </a:p>
           <a:p>
@@ -19182,7 +18878,7 @@
               <a:rPr>
                 <a:latin typeface="Arial"/>
               </a:rPr>
-              <a:t>Commitments scaled to engagement size</a:t>
+              <a:t>Commitments scaled to engagement size for lasting impact</a:t>
             </a:r>
           </a:p>
           <a:p>
@@ -19235,7 +18931,7 @@
           <a:lstStyle/>
           <a:p>
             <a:r>
-              <a:t>Section 6: Commercial Approach</a:t>
+              <a:t>Commercial Approach</a:t>
             </a:r>
           </a:p>
         </p:txBody>
@@ -19332,7 +19028,7 @@
               <a:rPr>
                 <a:latin typeface="Arial"/>
               </a:rPr>
-              <a:t>Fixed Capacity: balance agility and cost certainty</a:t>
+              <a:t>Fixed Capacity: balanced agility and cost certainty</a:t>
             </a:r>
           </a:p>
         </p:txBody>
@@ -19415,7 +19111,7 @@
           <a:lstStyle/>
           <a:p>
             <a:r>
-              <a:t>Key assumptions behind rate card &amp; discounts</a:t>
+              <a:t>Rate card and discount assumptions</a:t>
             </a:r>
           </a:p>
         </p:txBody>
@@ -19459,7 +19155,7 @@
               <a:rPr>
                 <a:latin typeface="Arial"/>
               </a:rPr>
-              <a:t>8-hour working day in normal delivery environments</a:t>
+              <a:t>8-hour working day; normal delivery environments</a:t>
             </a:r>
           </a:p>
           <a:p>
@@ -19488,34 +19184,6 @@
                 <a:latin typeface="Arial"/>
               </a:rPr>
               <a:t>Rates refined at call-off for specialist needs</a:t>
-            </a:r>
-          </a:p>
-          <a:p>
-            <a:pPr>
-              <a:spcBef>
-                <a:spcPts val="400"/>
-              </a:spcBef>
-              <a:buChar char="•"/>
-            </a:pPr>
-            <a:r>
-              <a:rPr>
-                <a:latin typeface="Arial"/>
-              </a:rPr>
-              <a:t>Volume discounts for sustained delivery</a:t>
-            </a:r>
-          </a:p>
-          <a:p>
-            <a:pPr>
-              <a:spcBef>
-                <a:spcPts val="400"/>
-              </a:spcBef>
-              <a:buChar char="•"/>
-            </a:pPr>
-            <a:r>
-              <a:rPr>
-                <a:latin typeface="Arial"/>
-              </a:rPr>
-              <a:t>Transparent cost drivers and assumptions</a:t>
             </a:r>
           </a:p>
         </p:txBody>
@@ -19554,7 +19222,7 @@
           <a:lstStyle/>
           <a:p>
             <a:r>
-              <a:t>Innovation fund governance principles</a:t>
+              <a:t>Innovation fund governance</a:t>
             </a:r>
           </a:p>
         </p:txBody>
@@ -19598,7 +19266,7 @@
               <a:rPr>
                 <a:latin typeface="Arial"/>
               </a:rPr>
-              <a:t>Balanced access to funds</a:t>
+              <a:t>Balanced access to funding</a:t>
             </a:r>
           </a:p>
           <a:p>
@@ -19670,7 +19338,7 @@
               <a:rPr>
                 <a:latin typeface="Arial"/>
               </a:rPr>
-              <a:t>Visible criteria, scoring, rationale</a:t>
+              <a:t>Visible criteria, scoring, and rationale</a:t>
             </a:r>
           </a:p>
           <a:p>
@@ -19698,7 +19366,7 @@
               <a:rPr>
                 <a:latin typeface="Arial"/>
               </a:rPr>
-              <a:t>Structured participation, open outcomes</a:t>
+              <a:t>Structured participation and open outcomes</a:t>
             </a:r>
           </a:p>
         </p:txBody>
@@ -19776,7 +19444,7 @@
           <a:lstStyle/>
           <a:p>
             <a:r>
-              <a:t>IBM and Stable: scale with sustainable capability</a:t>
+              <a:t>IBM and Stable: scale with local expertise</a:t>
             </a:r>
           </a:p>
         </p:txBody>
@@ -19815,7 +19483,7 @@
           <a:lstStyle/>
           <a:p>
             <a:r>
-              <a:t>Mobilise NRW and supplier discovery</a:t>
+              <a:t>Next steps: mobilise NRW and suppliers for discovery</a:t>
             </a:r>
           </a:p>
         </p:txBody>
@@ -19931,7 +19599,7 @@
               <a:rPr>
                 <a:latin typeface="Arial"/>
               </a:rPr>
-              <a:t>NRW: share system inventory and data dictionary</a:t>
+              <a:t>NRW: share system inventory &amp; data dictionary</a:t>
             </a:r>
           </a:p>
           <a:p>
@@ -19945,7 +19613,7 @@
               <a:rPr>
                 <a:latin typeface="Arial"/>
               </a:rPr>
-              <a:t>NRW: agree innovation window hypotheses</a:t>
+              <a:t>NRW: align on innovation window hypotheses</a:t>
             </a:r>
           </a:p>
           <a:p>
@@ -19959,7 +19627,7 @@
               <a:rPr>
                 <a:latin typeface="Arial"/>
               </a:rPr>
-              <a:t>NRW: review sustainability and social value KPIs</a:t>
+              <a:t>NRW: review sustainability &amp; social value KPIs</a:t>
             </a:r>
           </a:p>
         </p:txBody>
@@ -20027,7 +19695,7 @@
               <a:rPr>
                 <a:latin typeface="Arial"/>
               </a:rPr>
-              <a:t>For follow-up</a:t>
+              <a:t>Contact us</a:t>
             </a:r>
             <a:br/>
             <a:br/>
@@ -20035,28 +19703,59 @@
               <a:rPr>
                 <a:latin typeface="Arial"/>
               </a:rPr>
-              <a:t>Dave Aspden (Stable CEO) — dave@stable.co.uk</a:t>
+              <a:t>Dave Aspden — Stable CEO</a:t>
             </a:r>
             <a:br/>
             <a:r>
               <a:rPr>
                 <a:latin typeface="Arial"/>
               </a:rPr>
-              <a:t>Phil Davenport (IBM Client Delivery Partner) — philip.davenport@ibm.com</a:t>
-            </a:r>
+              <a:t>dave@stable.co.uk</a:t>
+            </a:r>
+            <a:br/>
             <a:br/>
             <a:r>
               <a:rPr>
                 <a:latin typeface="Arial"/>
               </a:rPr>
-              <a:t>David Rowley (IBM Microsoft Practice CTO) — david.rowley@ibm.com</a:t>
+              <a:t>Phil Davenport — IBM Client Delivery Partner</a:t>
             </a:r>
             <a:br/>
             <a:r>
               <a:rPr>
                 <a:latin typeface="Arial"/>
               </a:rPr>
-              <a:t>Ryan Lewis (Stable CTO/MD) — ryan@stable.co.uk</a:t>
+              <a:t>philip.davenport@ibm.com</a:t>
+            </a:r>
+            <a:br/>
+            <a:br/>
+            <a:r>
+              <a:rPr>
+                <a:latin typeface="Arial"/>
+              </a:rPr>
+              <a:t>David Rowley — IBM Microsoft Practice CTO</a:t>
+            </a:r>
+            <a:br/>
+            <a:r>
+              <a:rPr>
+                <a:latin typeface="Arial"/>
+              </a:rPr>
+              <a:t>david.rowley@ibm.com</a:t>
+            </a:r>
+            <a:br/>
+            <a:br/>
+            <a:r>
+              <a:rPr>
+                <a:latin typeface="Arial"/>
+              </a:rPr>
+              <a:t>Ryan Lewis — Stable CTO/MD</a:t>
+            </a:r>
+            <a:br/>
+            <a:r>
+              <a:rPr>
+                <a:latin typeface="Arial"/>
+              </a:rPr>
+              <a:t>ryan@stable.co.uk</a:t>
             </a:r>
           </a:p>
         </p:txBody>
@@ -20137,118 +19836,70 @@
       </p:sp>
       <p:sp>
         <p:nvSpPr>
-          <p:cNvPr id="3" name="Text Placeholder 2"/>
-          <p:cNvSpPr>
-            <a:spLocks noGrp="1"/>
-          </p:cNvSpPr>
-          <p:nvPr>
-            <p:ph type="body" idx="12" sz="quarter"/>
+          <p:cNvPr id="3" name="Content Placeholder 2"/>
+          <p:cNvSpPr>
+            <a:spLocks noGrp="1"/>
+          </p:cNvSpPr>
+          <p:nvPr>
+            <p:ph idx="17" sz="quarter"/>
           </p:nvPr>
         </p:nvSpPr>
         <p:spPr/>
         <p:txBody>
           <a:bodyPr/>
           <a:lstStyle/>
-          <a:p>
-            <a:pPr>
-              <a:spcBef>
-                <a:spcPts val="400"/>
-              </a:spcBef>
-            </a:pPr>
-            <a:r>
-              <a:rPr>
-                <a:latin typeface="Arial"/>
-              </a:rPr>
-              <a:t>Integrated transformation from strategy to live service</a:t>
-            </a:r>
-          </a:p>
-        </p:txBody>
-      </p:sp>
-      <p:sp>
-        <p:nvSpPr>
-          <p:cNvPr id="4" name="Text Placeholder 3"/>
-          <p:cNvSpPr>
-            <a:spLocks noGrp="1"/>
-          </p:cNvSpPr>
-          <p:nvPr>
-            <p:ph type="body" idx="13" sz="quarter"/>
+          <a:p/>
+        </p:txBody>
+      </p:sp>
+      <p:sp>
+        <p:nvSpPr>
+          <p:cNvPr id="4" name="Content Placeholder 3"/>
+          <p:cNvSpPr>
+            <a:spLocks noGrp="1"/>
+          </p:cNvSpPr>
+          <p:nvPr>
+            <p:ph idx="18" sz="quarter"/>
           </p:nvPr>
         </p:nvSpPr>
         <p:spPr/>
         <p:txBody>
           <a:bodyPr/>
           <a:lstStyle/>
-          <a:p>
-            <a:pPr>
-              <a:spcBef>
-                <a:spcPts val="400"/>
-              </a:spcBef>
-            </a:pPr>
-            <a:r>
-              <a:rPr>
-                <a:latin typeface="Arial"/>
-              </a:rPr>
-              <a:t>Local Welsh presence and bilingual engagement</a:t>
-            </a:r>
-          </a:p>
-        </p:txBody>
-      </p:sp>
-      <p:sp>
-        <p:nvSpPr>
-          <p:cNvPr id="5" name="Text Placeholder 4"/>
-          <p:cNvSpPr>
-            <a:spLocks noGrp="1"/>
-          </p:cNvSpPr>
-          <p:nvPr>
-            <p:ph type="body" idx="14" sz="quarter"/>
+          <a:p/>
+        </p:txBody>
+      </p:sp>
+      <p:sp>
+        <p:nvSpPr>
+          <p:cNvPr id="5" name="Content Placeholder 4"/>
+          <p:cNvSpPr>
+            <a:spLocks noGrp="1"/>
+          </p:cNvSpPr>
+          <p:nvPr>
+            <p:ph idx="20" sz="quarter"/>
           </p:nvPr>
         </p:nvSpPr>
         <p:spPr/>
         <p:txBody>
           <a:bodyPr/>
           <a:lstStyle/>
-          <a:p>
-            <a:pPr>
-              <a:spcBef>
-                <a:spcPts val="400"/>
-              </a:spcBef>
-            </a:pPr>
-            <a:r>
-              <a:rPr>
-                <a:latin typeface="Arial"/>
-              </a:rPr>
-              <a:t>Continuous knowledge transfer and capability uplift</a:t>
-            </a:r>
-          </a:p>
-        </p:txBody>
-      </p:sp>
-      <p:sp>
-        <p:nvSpPr>
-          <p:cNvPr id="6" name="Text Placeholder 5"/>
-          <p:cNvSpPr>
-            <a:spLocks noGrp="1"/>
-          </p:cNvSpPr>
-          <p:nvPr>
-            <p:ph type="body" idx="15" sz="quarter"/>
+          <a:p/>
+        </p:txBody>
+      </p:sp>
+      <p:sp>
+        <p:nvSpPr>
+          <p:cNvPr id="6" name="Content Placeholder 5"/>
+          <p:cNvSpPr>
+            <a:spLocks noGrp="1"/>
+          </p:cNvSpPr>
+          <p:nvPr>
+            <p:ph idx="19" sz="quarter"/>
           </p:nvPr>
         </p:nvSpPr>
         <p:spPr/>
         <p:txBody>
           <a:bodyPr/>
           <a:lstStyle/>
-          <a:p>
-            <a:pPr>
-              <a:spcBef>
-                <a:spcPts val="400"/>
-              </a:spcBef>
-            </a:pPr>
-            <a:r>
-              <a:rPr>
-                <a:latin typeface="Arial"/>
-              </a:rPr>
-              <a:t>Structured governance and delivery momentum</a:t>
-            </a:r>
-          </a:p>
+          <a:p/>
         </p:txBody>
       </p:sp>
     </p:spTree>
@@ -20315,7 +19966,7 @@
               <a:rPr>
                 <a:latin typeface="Arial"/>
               </a:rPr>
-              <a:t>Regulated environment needs structured methods</a:t>
+              <a:t>Regulated delivery needs structured methods</a:t>
             </a:r>
           </a:p>
           <a:p>
@@ -20343,7 +19994,7 @@
               <a:rPr>
                 <a:latin typeface="Arial"/>
               </a:rPr>
-              <a:t>Ensure operational resilience during change</a:t>
+              <a:t>Preserve operational resilience during transformation</a:t>
             </a:r>
           </a:p>
         </p:txBody>
@@ -20373,7 +20024,7 @@
               <a:rPr>
                 <a:latin typeface="Arial"/>
               </a:rPr>
-              <a:t>Capability uplift enables sustainable transformation</a:t>
+              <a:t>Capability uplift enables sustainable change</a:t>
             </a:r>
           </a:p>
           <a:p>
@@ -20401,7 +20052,7 @@
               <a:rPr>
                 <a:latin typeface="Arial"/>
               </a:rPr>
-              <a:t>Bilingual needs met via local expertise</a:t>
+              <a:t>Local bilingual expertise meets language requirements</a:t>
             </a:r>
           </a:p>
         </p:txBody>
@@ -20440,7 +20091,7 @@
           <a:lstStyle/>
           <a:p>
             <a:r>
-              <a:t>Team Wales blended delivery model</a:t>
+              <a:t>Team Wales — blended delivery model</a:t>
             </a:r>
           </a:p>
         </p:txBody>
@@ -20470,7 +20121,7 @@
               <a:rPr>
                 <a:latin typeface="Arial"/>
               </a:rPr>
-              <a:t>Local: Stable Welsh delivery partner</a:t>
+              <a:t>Stable: local delivery partner</a:t>
             </a:r>
           </a:p>
           <a:p>
@@ -20484,7 +20135,7 @@
               <a:rPr>
                 <a:latin typeface="Arial"/>
               </a:rPr>
-              <a:t>Local architecture and engineering expertise</a:t>
+              <a:t>Welsh architecture &amp; engineering expertise</a:t>
             </a:r>
           </a:p>
           <a:p>
@@ -20498,7 +20149,7 @@
               <a:rPr>
                 <a:latin typeface="Arial"/>
               </a:rPr>
-              <a:t>Community and public-sector ties</a:t>
+              <a:t>Community and public-sector relationships</a:t>
             </a:r>
           </a:p>
           <a:p>
@@ -20542,7 +20193,7 @@
               <a:rPr>
                 <a:latin typeface="Arial"/>
               </a:rPr>
-              <a:t>Global: IBM scale and specialist accelerators</a:t>
+              <a:t>IBM: global scale and specialist accelerators</a:t>
             </a:r>
           </a:p>
           <a:p>
@@ -20662,125 +20313,77 @@
           <a:lstStyle/>
           <a:p>
             <a:r>
-              <a:t>IBM core strengths within the DDaT Framework</a:t>
-            </a:r>
-          </a:p>
-        </p:txBody>
-      </p:sp>
-      <p:sp>
-        <p:nvSpPr>
-          <p:cNvPr id="3" name="Text Placeholder 2"/>
-          <p:cNvSpPr>
-            <a:spLocks noGrp="1"/>
-          </p:cNvSpPr>
-          <p:nvPr>
-            <p:ph type="body" idx="12" sz="quarter"/>
+              <a:t>IBM strengths in the DDaT Framework</a:t>
+            </a:r>
+          </a:p>
+        </p:txBody>
+      </p:sp>
+      <p:sp>
+        <p:nvSpPr>
+          <p:cNvPr id="3" name="Content Placeholder 2"/>
+          <p:cNvSpPr>
+            <a:spLocks noGrp="1"/>
+          </p:cNvSpPr>
+          <p:nvPr>
+            <p:ph idx="17" sz="quarter"/>
           </p:nvPr>
         </p:nvSpPr>
         <p:spPr/>
         <p:txBody>
           <a:bodyPr/>
           <a:lstStyle/>
-          <a:p>
-            <a:pPr>
-              <a:spcBef>
-                <a:spcPts val="400"/>
-              </a:spcBef>
-            </a:pPr>
-            <a:r>
-              <a:rPr>
-                <a:latin typeface="Arial"/>
-              </a:rPr>
-              <a:t>End-to-end digital, data and technology delivery</a:t>
-            </a:r>
-          </a:p>
-        </p:txBody>
-      </p:sp>
-      <p:sp>
-        <p:nvSpPr>
-          <p:cNvPr id="4" name="Text Placeholder 3"/>
-          <p:cNvSpPr>
-            <a:spLocks noGrp="1"/>
-          </p:cNvSpPr>
-          <p:nvPr>
-            <p:ph type="body" idx="13" sz="quarter"/>
+          <a:p/>
+        </p:txBody>
+      </p:sp>
+      <p:sp>
+        <p:nvSpPr>
+          <p:cNvPr id="4" name="Content Placeholder 3"/>
+          <p:cNvSpPr>
+            <a:spLocks noGrp="1"/>
+          </p:cNvSpPr>
+          <p:nvPr>
+            <p:ph idx="18" sz="quarter"/>
           </p:nvPr>
         </p:nvSpPr>
         <p:spPr/>
         <p:txBody>
           <a:bodyPr/>
           <a:lstStyle/>
-          <a:p>
-            <a:pPr>
-              <a:spcBef>
-                <a:spcPts val="400"/>
-              </a:spcBef>
-            </a:pPr>
-            <a:r>
-              <a:rPr>
-                <a:latin typeface="Arial"/>
-              </a:rPr>
-              <a:t>Structured engineering, product and design disciplines</a:t>
-            </a:r>
-          </a:p>
-        </p:txBody>
-      </p:sp>
-      <p:sp>
-        <p:nvSpPr>
-          <p:cNvPr id="5" name="Text Placeholder 4"/>
-          <p:cNvSpPr>
-            <a:spLocks noGrp="1"/>
-          </p:cNvSpPr>
-          <p:nvPr>
-            <p:ph type="body" idx="14" sz="quarter"/>
+          <a:p/>
+        </p:txBody>
+      </p:sp>
+      <p:sp>
+        <p:nvSpPr>
+          <p:cNvPr id="5" name="Content Placeholder 4"/>
+          <p:cNvSpPr>
+            <a:spLocks noGrp="1"/>
+          </p:cNvSpPr>
+          <p:nvPr>
+            <p:ph idx="20" sz="quarter"/>
           </p:nvPr>
         </p:nvSpPr>
         <p:spPr/>
         <p:txBody>
           <a:bodyPr/>
           <a:lstStyle/>
-          <a:p>
-            <a:pPr>
-              <a:spcBef>
-                <a:spcPts val="400"/>
-              </a:spcBef>
-            </a:pPr>
-            <a:r>
-              <a:rPr>
-                <a:latin typeface="Arial"/>
-              </a:rPr>
-              <a:t>Experience in complex, regulated environments</a:t>
-            </a:r>
-          </a:p>
-        </p:txBody>
-      </p:sp>
-      <p:sp>
-        <p:nvSpPr>
-          <p:cNvPr id="6" name="Text Placeholder 5"/>
-          <p:cNvSpPr>
-            <a:spLocks noGrp="1"/>
-          </p:cNvSpPr>
-          <p:nvPr>
-            <p:ph type="body" idx="15" sz="quarter"/>
+          <a:p/>
+        </p:txBody>
+      </p:sp>
+      <p:sp>
+        <p:nvSpPr>
+          <p:cNvPr id="6" name="Content Placeholder 5"/>
+          <p:cNvSpPr>
+            <a:spLocks noGrp="1"/>
+          </p:cNvSpPr>
+          <p:nvPr>
+            <p:ph idx="19" sz="quarter"/>
           </p:nvPr>
         </p:nvSpPr>
         <p:spPr/>
         <p:txBody>
           <a:bodyPr/>
           <a:lstStyle/>
-          <a:p>
-            <a:pPr>
-              <a:spcBef>
-                <a:spcPts val="400"/>
-              </a:spcBef>
-            </a:pPr>
-            <a:r>
-              <a:rPr>
-                <a:latin typeface="Arial"/>
-              </a:rPr>
-              <a:t>Sustainable capability building and knowledge transfer</a:t>
-            </a:r>
-          </a:p>
+          <a:p/>
         </p:txBody>
       </p:sp>
     </p:spTree>
